--- a/src/report/assets/template.pptx
+++ b/src/report/assets/template.pptx
@@ -806,7 +806,7 @@
                 <a:uFillTx/>
                 <a:latin typeface="Amazon Ember Display"/>
               </a:rPr>
-              <a:t>© 2025, Amazon Web Services, Inc. or its affiliates. All rights reserved. Amazon Confidential and Trademark.</a:t>
+              <a:t>© 2026 Amazon Web Services, Inc. or its affiliates. For informational purposes only.</a:t>
             </a:r>
             <a:endParaRPr lang="en-US" sz="600" b="0" u="none" strike="noStrike">
               <a:solidFill>
@@ -1226,18 +1226,7 @@
                 <a:uFillTx/>
                 <a:latin typeface="Amazon Ember Display"/>
               </a:rPr>
-              <a:t>© 2026, </a:t>
-            </a:r>
-            <a:r>
-              <a:rPr lang="en-US" sz="600" b="0" u="none" strike="noStrike" dirty="0">
-                <a:solidFill>
-                  <a:schemeClr val="lt2"/>
-                </a:solidFill>
-                <a:effectLst/>
-                <a:uFillTx/>
-                <a:latin typeface="Amazon Ember Display"/>
-              </a:rPr>
-              <a:t>Amazon Web Services, Inc. or its affiliates. All rights reserved. Amazon Confidential and Trademark.</a:t>
+              <a:t>© 2026 Amazon Web Services, Inc. or its affiliates. For informational purposes only.</a:t>
             </a:r>
             <a:endParaRPr lang="en-US" sz="600" b="0" u="none" strike="noStrike" dirty="0">
               <a:solidFill>
@@ -1386,7 +1375,7 @@
                 <a:uFillTx/>
                 <a:latin typeface="Amazon Ember Display"/>
               </a:rPr>
-              <a:t>© 2025, Amazon Web Services, Inc. or its affiliates. All rights reserved. Amazon Confidential and Trademark.</a:t>
+              <a:t>© 2026 Amazon Web Services, Inc. or its affiliates. For informational purposes only.</a:t>
             </a:r>
             <a:endParaRPr lang="en-US" sz="600" b="0" u="none" strike="noStrike">
               <a:solidFill>
@@ -1802,29 +1791,7 @@
                 <a:uFillTx/>
                 <a:latin typeface="Amazon Ember Display"/>
               </a:rPr>
-              <a:t>© </a:t>
-            </a:r>
-            <a:r>
-              <a:rPr lang="en-US" sz="600" b="0" u="none" strike="noStrike" dirty="0">
-                <a:solidFill>
-                  <a:schemeClr val="tx1"/>
-                </a:solidFill>
-                <a:effectLst/>
-                <a:uFillTx/>
-                <a:latin typeface="Amazon Ember Display"/>
-              </a:rPr>
-              <a:t>2026</a:t>
-            </a:r>
-            <a:r>
-              <a:rPr lang="en-US" sz="600" b="0" u="none" strike="noStrike" dirty="0">
-                <a:solidFill>
-                  <a:schemeClr val="lt2"/>
-                </a:solidFill>
-                <a:effectLst/>
-                <a:uFillTx/>
-                <a:latin typeface="Amazon Ember Display"/>
-              </a:rPr>
-              <a:t>, Amazon Web Services, Inc. or its affiliates. All rights reserved. Amazon Confidential and Trademark.</a:t>
+              <a:t>© 2026 Amazon Web Services, Inc. or its affiliates. For informational purposes only.</a:t>
             </a:r>
             <a:endParaRPr lang="en-US" sz="600" b="0" u="none" strike="noStrike" dirty="0">
               <a:solidFill>
@@ -2191,29 +2158,7 @@
                 <a:uFillTx/>
                 <a:latin typeface="Amazon Ember Display"/>
               </a:rPr>
-              <a:t>© </a:t>
-            </a:r>
-            <a:r>
-              <a:rPr lang="en-US" sz="600" b="0" u="none" strike="noStrike" dirty="0">
-                <a:solidFill>
-                  <a:schemeClr val="tx1"/>
-                </a:solidFill>
-                <a:effectLst/>
-                <a:uFillTx/>
-                <a:latin typeface="Amazon Ember Display"/>
-              </a:rPr>
-              <a:t>2026</a:t>
-            </a:r>
-            <a:r>
-              <a:rPr lang="en-US" sz="600" b="0" u="none" strike="noStrike" dirty="0">
-                <a:solidFill>
-                  <a:schemeClr val="lt2"/>
-                </a:solidFill>
-                <a:effectLst/>
-                <a:uFillTx/>
-                <a:latin typeface="Amazon Ember Display"/>
-              </a:rPr>
-              <a:t>, Amazon Web Services, Inc. or its affiliates. All rights reserved. Amazon Confidential and Trademark.</a:t>
+              <a:t>© 2026 Amazon Web Services, Inc. or its affiliates. For informational purposes only.</a:t>
             </a:r>
             <a:endParaRPr lang="en-US" sz="600" b="0" u="none" strike="noStrike" dirty="0">
               <a:solidFill>
@@ -2968,8 +2913,8 @@
         </p:nvSpPr>
         <p:spPr>
           <a:xfrm>
-            <a:off x="1744200" y="2067480"/>
-            <a:ext cx="5868000" cy="923040"/>
+            <a:off x="431280" y="2067480"/>
+            <a:ext cx="11064240" cy="923040"/>
           </a:xfrm>
           <a:prstGeom prst="rect">
             <a:avLst/>
@@ -2992,7 +2937,7 @@
               <a:buNone/>
             </a:pPr>
             <a:r>
-              <a:rPr lang="en-US" sz="6000" b="1" u="none" strike="noStrike">
+              <a:rPr lang="en-US" sz="4400" b="1" u="none" strike="noStrike">
                 <a:solidFill>
                   <a:schemeClr val="lt2"/>
                 </a:solidFill>
@@ -3001,9 +2946,9 @@
                 <a:latin typeface="Amazon Ember Display"/>
                 <a:ea typeface="Amazon Ember Display"/>
               </a:rPr>
-              <a:t>AWS Transform</a:t>
+              <a:t>Database Modernizer Assessment</a:t>
             </a:r>
-            <a:endParaRPr lang="en-US" sz="6000" b="0" u="none" strike="noStrike">
+            <a:endParaRPr lang="en-US" sz="4400" b="0" u="none" strike="noStrike">
               <a:solidFill>
                 <a:schemeClr val="lt1"/>
               </a:solidFill>
@@ -3027,7 +2972,7 @@
         <p:spPr>
           <a:xfrm>
             <a:off x="522720" y="3184920"/>
-            <a:ext cx="7210800" cy="535320"/>
+            <a:ext cx="10972800" cy="535320"/>
           </a:xfrm>
           <a:prstGeom prst="rect">
             <a:avLst/>
@@ -3065,7 +3010,7 @@
                 <a:latin typeface="Amazon Ember Display"/>
                 <a:ea typeface="Amazon Ember Display"/>
               </a:rPr>
-              <a:t>Migration Assessment Business Case</a:t>
+              <a:t>Source database</a:t>
             </a:r>
             <a:endParaRPr lang="en-US" sz="3200" b="0" u="none" strike="noStrike">
               <a:solidFill>
@@ -3121,7 +3066,7 @@
               </a:lnSpc>
             </a:pPr>
             <a:r>
-              <a:rPr lang="en-US" sz="1600" b="0" i="1" u="none" strike="noStrike">
+              <a:rPr lang="en-US" sz="1100" b="0" i="1" u="none" strike="noStrike">
                 <a:solidFill>
                   <a:srgbClr val="FFFFFF"/>
                 </a:solidFill>
@@ -3129,918 +3074,15 @@
                 <a:uFillTx/>
                 <a:latin typeface="Amazon Ember"/>
               </a:rPr>
-              <a:t>August 2026</a:t>
+              <a:t>Job · Generated</a:t>
             </a:r>
-            <a:endParaRPr lang="en-US" sz="1600" b="0" u="none" strike="noStrike">
+            <a:endParaRPr lang="en-US" sz="1100" b="0" u="none" strike="noStrike">
               <a:solidFill>
                 <a:srgbClr val="FFFFFF"/>
               </a:solidFill>
               <a:effectLst/>
               <a:uFillTx/>
               <a:latin typeface="Arial"/>
-            </a:endParaRPr>
-          </a:p>
-        </p:txBody>
-      </p:sp>
-      <p:sp>
-        <p:nvSpPr>
-          <p:cNvPr id="1031" name="Freeform: Shape 5"/>
-          <p:cNvSpPr/>
-          <p:nvPr/>
-        </p:nvSpPr>
-        <p:spPr>
-          <a:xfrm>
-            <a:off x="522720" y="1955880"/>
-            <a:ext cx="1027800" cy="1146240"/>
-          </a:xfrm>
-          <a:custGeom>
-            <a:avLst/>
-            <a:gdLst>
-              <a:gd name="textAreaLeft" fmla="*/ 0 w 1027800"/>
-              <a:gd name="textAreaRight" fmla="*/ 1028160 w 1027800"/>
-              <a:gd name="textAreaTop" fmla="*/ 0 h 1146240"/>
-              <a:gd name="textAreaBottom" fmla="*/ 1146600 h 1146240"/>
-              <a:gd name="GluePoint1X" fmla="*/ 447638 w 457200"/>
-              <a:gd name="GluePoint1Y" fmla="*/ 167819 h 533978"/>
-              <a:gd name="GluePoint2X" fmla="*/ 428551 w 457200"/>
-              <a:gd name="GluePoint2Y" fmla="*/ 167884 h 533978"/>
-              <a:gd name="GluePoint3X" fmla="*/ 338100 w 457200"/>
-              <a:gd name="GluePoint3Y" fmla="*/ 220663 h 533978"/>
-              <a:gd name="GluePoint4X" fmla="*/ 333375 w 457200"/>
-              <a:gd name="GluePoint4Y" fmla="*/ 228889 h 533978"/>
-              <a:gd name="GluePoint5X" fmla="*/ 333375 w 457200"/>
-              <a:gd name="GluePoint5Y" fmla="*/ 289677 h 533978"/>
-              <a:gd name="GluePoint6X" fmla="*/ 300539 w 457200"/>
-              <a:gd name="GluePoint6Y" fmla="*/ 306094 h 533978"/>
-              <a:gd name="GluePoint7X" fmla="*/ 295275 w 457200"/>
-              <a:gd name="GluePoint7Y" fmla="*/ 314614 h 533978"/>
-              <a:gd name="GluePoint8X" fmla="*/ 295275 w 457200"/>
-              <a:gd name="GluePoint8Y" fmla="*/ 347952 h 533978"/>
-              <a:gd name="GluePoint9X" fmla="*/ 266700 w 457200"/>
-              <a:gd name="GluePoint9Y" fmla="*/ 369383 h 533978"/>
-              <a:gd name="GluePoint10X" fmla="*/ 238125 w 457200"/>
-              <a:gd name="GluePoint10Y" fmla="*/ 347957 h 533978"/>
-              <a:gd name="GluePoint11X" fmla="*/ 238125 w 457200"/>
-              <a:gd name="GluePoint11Y" fmla="*/ 186023 h 533978"/>
-              <a:gd name="GluePoint12X" fmla="*/ 266700 w 457200"/>
-              <a:gd name="GluePoint12Y" fmla="*/ 164596 h 533978"/>
-              <a:gd name="GluePoint13X" fmla="*/ 295275 w 457200"/>
-              <a:gd name="GluePoint13Y" fmla="*/ 186027 h 533978"/>
-              <a:gd name="GluePoint14X" fmla="*/ 295275 w 457200"/>
-              <a:gd name="GluePoint14Y" fmla="*/ 223174 h 533978"/>
-              <a:gd name="GluePoint15X" fmla="*/ 314325 w 457200"/>
-              <a:gd name="GluePoint15Y" fmla="*/ 212221 h 533978"/>
-              <a:gd name="GluePoint16X" fmla="*/ 314325 w 457200"/>
-              <a:gd name="GluePoint16Y" fmla="*/ 181264 h 533978"/>
-              <a:gd name="GluePoint17X" fmla="*/ 310511 w 457200"/>
-              <a:gd name="GluePoint17Y" fmla="*/ 173646 h 533978"/>
-              <a:gd name="GluePoint18X" fmla="*/ 272411 w 457200"/>
-              <a:gd name="GluePoint18Y" fmla="*/ 145071 h 533978"/>
-              <a:gd name="GluePoint19X" fmla="*/ 260989 w 457200"/>
-              <a:gd name="GluePoint19Y" fmla="*/ 145071 h 533978"/>
-              <a:gd name="GluePoint20X" fmla="*/ 228600 w 457200"/>
-              <a:gd name="GluePoint20Y" fmla="*/ 169358 h 533978"/>
-              <a:gd name="GluePoint21X" fmla="*/ 196211 w 457200"/>
-              <a:gd name="GluePoint21Y" fmla="*/ 145071 h 533978"/>
-              <a:gd name="GluePoint22X" fmla="*/ 185449 w 457200"/>
-              <a:gd name="GluePoint22Y" fmla="*/ 144611 h 533978"/>
-              <a:gd name="GluePoint23X" fmla="*/ 147349 w 457200"/>
-              <a:gd name="GluePoint23Y" fmla="*/ 168424 h 533978"/>
-              <a:gd name="GluePoint24X" fmla="*/ 142875 w 457200"/>
-              <a:gd name="GluePoint24Y" fmla="*/ 176502 h 533978"/>
-              <a:gd name="GluePoint25X" fmla="*/ 142875 w 457200"/>
-              <a:gd name="GluePoint25Y" fmla="*/ 213477 h 533978"/>
-              <a:gd name="GluePoint26X" fmla="*/ 110039 w 457200"/>
-              <a:gd name="GluePoint26Y" fmla="*/ 229894 h 533978"/>
-              <a:gd name="GluePoint27X" fmla="*/ 104775 w 457200"/>
-              <a:gd name="GluePoint27Y" fmla="*/ 238414 h 533978"/>
-              <a:gd name="GluePoint28X" fmla="*/ 104775 w 457200"/>
-              <a:gd name="GluePoint28Y" fmla="*/ 299434 h 533978"/>
-              <a:gd name="GluePoint29X" fmla="*/ 19050 w 457200"/>
-              <a:gd name="GluePoint29Y" fmla="*/ 346195 h 533978"/>
-              <a:gd name="GluePoint30X" fmla="*/ 19050 w 457200"/>
-              <a:gd name="GluePoint30Y" fmla="*/ 160406 h 533978"/>
-              <a:gd name="GluePoint31X" fmla="*/ 37337 w 457200"/>
-              <a:gd name="GluePoint31Y" fmla="*/ 127859 h 533978"/>
-              <a:gd name="GluePoint32X" fmla="*/ 206964 w 457200"/>
-              <a:gd name="GluePoint32Y" fmla="*/ 24610 h 533978"/>
-              <a:gd name="GluePoint33X" fmla="*/ 248636 w 457200"/>
-              <a:gd name="GluePoint33Y" fmla="*/ 25939 h 533978"/>
-              <a:gd name="GluePoint34X" fmla="*/ 388884 w 457200"/>
-              <a:gd name="GluePoint34Y" fmla="*/ 124115 h 533978"/>
-              <a:gd name="GluePoint35X" fmla="*/ 342900 w 457200"/>
-              <a:gd name="GluePoint35Y" fmla="*/ 124115 h 533978"/>
-              <a:gd name="GluePoint36X" fmla="*/ 342900 w 457200"/>
-              <a:gd name="GluePoint36Y" fmla="*/ 143165 h 533978"/>
-              <a:gd name="GluePoint37X" fmla="*/ 419100 w 457200"/>
-              <a:gd name="GluePoint37Y" fmla="*/ 143165 h 533978"/>
-              <a:gd name="GluePoint38X" fmla="*/ 428625 w 457200"/>
-              <a:gd name="GluePoint38Y" fmla="*/ 133640 h 533978"/>
-              <a:gd name="GluePoint39X" fmla="*/ 428625 w 457200"/>
-              <a:gd name="GluePoint39Y" fmla="*/ 57440 h 533978"/>
-              <a:gd name="GluePoint40X" fmla="*/ 409575 w 457200"/>
-              <a:gd name="GluePoint40Y" fmla="*/ 57440 h 533978"/>
-              <a:gd name="GluePoint41X" fmla="*/ 409575 w 457200"/>
-              <a:gd name="GluePoint41Y" fmla="*/ 115347 h 533978"/>
-              <a:gd name="GluePoint42X" fmla="*/ 259556 w 457200"/>
-              <a:gd name="GluePoint42Y" fmla="*/ 10332 h 533978"/>
-              <a:gd name="GluePoint43X" fmla="*/ 197067 w 457200"/>
-              <a:gd name="GluePoint43Y" fmla="*/ 8336 h 533978"/>
-              <a:gd name="GluePoint44X" fmla="*/ 27440 w 457200"/>
-              <a:gd name="GluePoint44Y" fmla="*/ 111590 h 533978"/>
-              <a:gd name="GluePoint45X" fmla="*/ 0 w 457200"/>
-              <a:gd name="GluePoint45Y" fmla="*/ 160406 h 533978"/>
-              <a:gd name="GluePoint46X" fmla="*/ 0 w 457200"/>
-              <a:gd name="GluePoint46Y" fmla="*/ 346195 h 533978"/>
-              <a:gd name="GluePoint47X" fmla="*/ 9320 w 457200"/>
-              <a:gd name="GluePoint47Y" fmla="*/ 362575 h 533978"/>
-              <a:gd name="GluePoint48X" fmla="*/ 19040 w 457200"/>
-              <a:gd name="GluePoint48Y" fmla="*/ 365267 h 533978"/>
-              <a:gd name="GluePoint49X" fmla="*/ 28165 w 457200"/>
-              <a:gd name="GluePoint49Y" fmla="*/ 362919 h 533978"/>
-              <a:gd name="GluePoint50X" fmla="*/ 118858 w 457200"/>
-              <a:gd name="GluePoint50Y" fmla="*/ 313452 h 533978"/>
-              <a:gd name="GluePoint51X" fmla="*/ 123825 w 457200"/>
-              <a:gd name="GluePoint51Y" fmla="*/ 305090 h 533978"/>
-              <a:gd name="GluePoint52X" fmla="*/ 123825 w 457200"/>
-              <a:gd name="GluePoint52Y" fmla="*/ 244303 h 533978"/>
-              <a:gd name="GluePoint53X" fmla="*/ 156661 w 457200"/>
-              <a:gd name="GluePoint53Y" fmla="*/ 227885 h 533978"/>
-              <a:gd name="GluePoint54X" fmla="*/ 161925 w 457200"/>
-              <a:gd name="GluePoint54Y" fmla="*/ 219365 h 533978"/>
-              <a:gd name="GluePoint55X" fmla="*/ 161925 w 457200"/>
-              <a:gd name="GluePoint55Y" fmla="*/ 181782 h 533978"/>
-              <a:gd name="GluePoint56X" fmla="*/ 190007 w 457200"/>
-              <a:gd name="GluePoint56Y" fmla="*/ 164229 h 533978"/>
-              <a:gd name="GluePoint57X" fmla="*/ 219075 w 457200"/>
-              <a:gd name="GluePoint57Y" fmla="*/ 186023 h 533978"/>
-              <a:gd name="GluePoint58X" fmla="*/ 219075 w 457200"/>
-              <a:gd name="GluePoint58Y" fmla="*/ 347957 h 533978"/>
-              <a:gd name="GluePoint59X" fmla="*/ 190500 w 457200"/>
-              <a:gd name="GluePoint59Y" fmla="*/ 369384 h 533978"/>
-              <a:gd name="GluePoint60X" fmla="*/ 161925 w 457200"/>
-              <a:gd name="GluePoint60Y" fmla="*/ 347953 h 533978"/>
-              <a:gd name="GluePoint61X" fmla="*/ 161925 w 457200"/>
-              <a:gd name="GluePoint61Y" fmla="*/ 310805 h 533978"/>
-              <a:gd name="GluePoint62X" fmla="*/ 142875 w 457200"/>
-              <a:gd name="GluePoint62Y" fmla="*/ 321283 h 533978"/>
-              <a:gd name="GluePoint63X" fmla="*/ 142875 w 457200"/>
-              <a:gd name="GluePoint63Y" fmla="*/ 352715 h 533978"/>
-              <a:gd name="GluePoint64X" fmla="*/ 146689 w 457200"/>
-              <a:gd name="GluePoint64Y" fmla="*/ 360333 h 533978"/>
-              <a:gd name="GluePoint65X" fmla="*/ 184789 w 457200"/>
-              <a:gd name="GluePoint65Y" fmla="*/ 388908 h 533978"/>
-              <a:gd name="GluePoint66X" fmla="*/ 196211 w 457200"/>
-              <a:gd name="GluePoint66Y" fmla="*/ 388908 h 533978"/>
-              <a:gd name="GluePoint67X" fmla="*/ 228600 w 457200"/>
-              <a:gd name="GluePoint67Y" fmla="*/ 364622 h 533978"/>
-              <a:gd name="GluePoint68X" fmla="*/ 260989 w 457200"/>
-              <a:gd name="GluePoint68Y" fmla="*/ 388908 h 533978"/>
-              <a:gd name="GluePoint69X" fmla="*/ 272411 w 457200"/>
-              <a:gd name="GluePoint69Y" fmla="*/ 388908 h 533978"/>
-              <a:gd name="GluePoint70X" fmla="*/ 310511 w 457200"/>
-              <a:gd name="GluePoint70Y" fmla="*/ 360333 h 533978"/>
-              <a:gd name="GluePoint71X" fmla="*/ 314325 w 457200"/>
-              <a:gd name="GluePoint71Y" fmla="*/ 352715 h 533978"/>
-              <a:gd name="GluePoint72X" fmla="*/ 314325 w 457200"/>
-              <a:gd name="GluePoint72Y" fmla="*/ 320503 h 533978"/>
-              <a:gd name="GluePoint73X" fmla="*/ 347161 w 457200"/>
-              <a:gd name="GluePoint73Y" fmla="*/ 304085 h 533978"/>
-              <a:gd name="GluePoint74X" fmla="*/ 352425 w 457200"/>
-              <a:gd name="GluePoint74Y" fmla="*/ 295565 h 533978"/>
-              <a:gd name="GluePoint75X" fmla="*/ 352425 w 457200"/>
-              <a:gd name="GluePoint75Y" fmla="*/ 234360 h 533978"/>
-              <a:gd name="GluePoint76X" fmla="*/ 438150 w 457200"/>
-              <a:gd name="GluePoint76Y" fmla="*/ 184339 h 533978"/>
-              <a:gd name="GluePoint77X" fmla="*/ 438150 w 457200"/>
-              <a:gd name="GluePoint77Y" fmla="*/ 373574 h 533978"/>
-              <a:gd name="GluePoint78X" fmla="*/ 419863 w 457200"/>
-              <a:gd name="GluePoint78Y" fmla="*/ 406121 h 533978"/>
-              <a:gd name="GluePoint79X" fmla="*/ 250236 w 457200"/>
-              <a:gd name="GluePoint79Y" fmla="*/ 509370 h 533978"/>
-              <a:gd name="GluePoint80X" fmla="*/ 208564 w 457200"/>
-              <a:gd name="GluePoint80Y" fmla="*/ 508041 h 533978"/>
-              <a:gd name="GluePoint81X" fmla="*/ 68315 w 457200"/>
-              <a:gd name="GluePoint81Y" fmla="*/ 409865 h 533978"/>
-              <a:gd name="GluePoint82X" fmla="*/ 114300 w 457200"/>
-              <a:gd name="GluePoint82Y" fmla="*/ 409865 h 533978"/>
-              <a:gd name="GluePoint83X" fmla="*/ 114300 w 457200"/>
-              <a:gd name="GluePoint83Y" fmla="*/ 390815 h 533978"/>
-              <a:gd name="GluePoint84X" fmla="*/ 38100 w 457200"/>
-              <a:gd name="GluePoint84Y" fmla="*/ 390815 h 533978"/>
-              <a:gd name="GluePoint85X" fmla="*/ 28575 w 457200"/>
-              <a:gd name="GluePoint85Y" fmla="*/ 400340 h 533978"/>
-              <a:gd name="GluePoint86X" fmla="*/ 28575 w 457200"/>
-              <a:gd name="GluePoint86Y" fmla="*/ 476540 h 533978"/>
-              <a:gd name="GluePoint87X" fmla="*/ 47625 w 457200"/>
-              <a:gd name="GluePoint87Y" fmla="*/ 476540 h 533978"/>
-              <a:gd name="GluePoint88X" fmla="*/ 47625 w 457200"/>
-              <a:gd name="GluePoint88Y" fmla="*/ 418634 h 533978"/>
-              <a:gd name="GluePoint89X" fmla="*/ 197644 w 457200"/>
-              <a:gd name="GluePoint89Y" fmla="*/ 523649 h 533978"/>
-              <a:gd name="GluePoint90X" fmla="*/ 230423 w 457200"/>
-              <a:gd name="GluePoint90Y" fmla="*/ 533978 h 533978"/>
-              <a:gd name="GluePoint91X" fmla="*/ 260133 w 457200"/>
-              <a:gd name="GluePoint91Y" fmla="*/ 525644 h 533978"/>
-              <a:gd name="GluePoint92X" fmla="*/ 429759 w 457200"/>
-              <a:gd name="GluePoint92Y" fmla="*/ 422390 h 533978"/>
-              <a:gd name="GluePoint93X" fmla="*/ 457200 w 457200"/>
-              <a:gd name="GluePoint93Y" fmla="*/ 373574 h 533978"/>
-              <a:gd name="GluePoint94X" fmla="*/ 457200 w 457200"/>
-              <a:gd name="GluePoint94Y" fmla="*/ 184339 h 533978"/>
-              <a:gd name="GluePoint95X" fmla="*/ 447638 w 457200"/>
-              <a:gd name="GluePoint95Y" fmla="*/ 167819 h 533978"/>
-            </a:gdLst>
-            <a:ahLst/>
-            <a:cxnLst>
-              <a:cxn ang="0">
-                <a:pos x="GluePoint1X" y="GluePoint1Y"/>
-              </a:cxn>
-              <a:cxn ang="0">
-                <a:pos x="GluePoint2X" y="GluePoint2Y"/>
-              </a:cxn>
-              <a:cxn ang="0">
-                <a:pos x="GluePoint3X" y="GluePoint3Y"/>
-              </a:cxn>
-              <a:cxn ang="0">
-                <a:pos x="GluePoint4X" y="GluePoint4Y"/>
-              </a:cxn>
-              <a:cxn ang="0">
-                <a:pos x="GluePoint5X" y="GluePoint5Y"/>
-              </a:cxn>
-              <a:cxn ang="0">
-                <a:pos x="GluePoint6X" y="GluePoint6Y"/>
-              </a:cxn>
-              <a:cxn ang="0">
-                <a:pos x="GluePoint7X" y="GluePoint7Y"/>
-              </a:cxn>
-              <a:cxn ang="0">
-                <a:pos x="GluePoint8X" y="GluePoint8Y"/>
-              </a:cxn>
-              <a:cxn ang="0">
-                <a:pos x="GluePoint9X" y="GluePoint9Y"/>
-              </a:cxn>
-              <a:cxn ang="0">
-                <a:pos x="GluePoint10X" y="GluePoint10Y"/>
-              </a:cxn>
-              <a:cxn ang="0">
-                <a:pos x="GluePoint11X" y="GluePoint11Y"/>
-              </a:cxn>
-              <a:cxn ang="0">
-                <a:pos x="GluePoint12X" y="GluePoint12Y"/>
-              </a:cxn>
-              <a:cxn ang="0">
-                <a:pos x="GluePoint13X" y="GluePoint13Y"/>
-              </a:cxn>
-              <a:cxn ang="0">
-                <a:pos x="GluePoint14X" y="GluePoint14Y"/>
-              </a:cxn>
-              <a:cxn ang="0">
-                <a:pos x="GluePoint15X" y="GluePoint15Y"/>
-              </a:cxn>
-              <a:cxn ang="0">
-                <a:pos x="GluePoint16X" y="GluePoint16Y"/>
-              </a:cxn>
-              <a:cxn ang="0">
-                <a:pos x="GluePoint17X" y="GluePoint17Y"/>
-              </a:cxn>
-              <a:cxn ang="0">
-                <a:pos x="GluePoint18X" y="GluePoint18Y"/>
-              </a:cxn>
-              <a:cxn ang="0">
-                <a:pos x="GluePoint19X" y="GluePoint19Y"/>
-              </a:cxn>
-              <a:cxn ang="0">
-                <a:pos x="GluePoint20X" y="GluePoint20Y"/>
-              </a:cxn>
-              <a:cxn ang="0">
-                <a:pos x="GluePoint21X" y="GluePoint21Y"/>
-              </a:cxn>
-              <a:cxn ang="0">
-                <a:pos x="GluePoint22X" y="GluePoint22Y"/>
-              </a:cxn>
-              <a:cxn ang="0">
-                <a:pos x="GluePoint23X" y="GluePoint23Y"/>
-              </a:cxn>
-              <a:cxn ang="0">
-                <a:pos x="GluePoint24X" y="GluePoint24Y"/>
-              </a:cxn>
-              <a:cxn ang="0">
-                <a:pos x="GluePoint25X" y="GluePoint25Y"/>
-              </a:cxn>
-              <a:cxn ang="0">
-                <a:pos x="GluePoint26X" y="GluePoint26Y"/>
-              </a:cxn>
-              <a:cxn ang="0">
-                <a:pos x="GluePoint27X" y="GluePoint27Y"/>
-              </a:cxn>
-              <a:cxn ang="0">
-                <a:pos x="GluePoint28X" y="GluePoint28Y"/>
-              </a:cxn>
-              <a:cxn ang="0">
-                <a:pos x="GluePoint29X" y="GluePoint29Y"/>
-              </a:cxn>
-              <a:cxn ang="0">
-                <a:pos x="GluePoint30X" y="GluePoint30Y"/>
-              </a:cxn>
-              <a:cxn ang="0">
-                <a:pos x="GluePoint31X" y="GluePoint31Y"/>
-              </a:cxn>
-              <a:cxn ang="0">
-                <a:pos x="GluePoint32X" y="GluePoint32Y"/>
-              </a:cxn>
-              <a:cxn ang="0">
-                <a:pos x="GluePoint33X" y="GluePoint33Y"/>
-              </a:cxn>
-              <a:cxn ang="0">
-                <a:pos x="GluePoint34X" y="GluePoint34Y"/>
-              </a:cxn>
-              <a:cxn ang="0">
-                <a:pos x="GluePoint35X" y="GluePoint35Y"/>
-              </a:cxn>
-              <a:cxn ang="0">
-                <a:pos x="GluePoint36X" y="GluePoint36Y"/>
-              </a:cxn>
-              <a:cxn ang="0">
-                <a:pos x="GluePoint37X" y="GluePoint37Y"/>
-              </a:cxn>
-              <a:cxn ang="0">
-                <a:pos x="GluePoint38X" y="GluePoint38Y"/>
-              </a:cxn>
-              <a:cxn ang="0">
-                <a:pos x="GluePoint39X" y="GluePoint39Y"/>
-              </a:cxn>
-              <a:cxn ang="0">
-                <a:pos x="GluePoint40X" y="GluePoint40Y"/>
-              </a:cxn>
-              <a:cxn ang="0">
-                <a:pos x="GluePoint41X" y="GluePoint41Y"/>
-              </a:cxn>
-              <a:cxn ang="0">
-                <a:pos x="GluePoint42X" y="GluePoint42Y"/>
-              </a:cxn>
-              <a:cxn ang="0">
-                <a:pos x="GluePoint43X" y="GluePoint43Y"/>
-              </a:cxn>
-              <a:cxn ang="0">
-                <a:pos x="GluePoint44X" y="GluePoint44Y"/>
-              </a:cxn>
-              <a:cxn ang="0">
-                <a:pos x="GluePoint45X" y="GluePoint45Y"/>
-              </a:cxn>
-              <a:cxn ang="0">
-                <a:pos x="GluePoint46X" y="GluePoint46Y"/>
-              </a:cxn>
-              <a:cxn ang="0">
-                <a:pos x="GluePoint47X" y="GluePoint47Y"/>
-              </a:cxn>
-              <a:cxn ang="0">
-                <a:pos x="GluePoint48X" y="GluePoint48Y"/>
-              </a:cxn>
-              <a:cxn ang="0">
-                <a:pos x="GluePoint49X" y="GluePoint49Y"/>
-              </a:cxn>
-              <a:cxn ang="0">
-                <a:pos x="GluePoint50X" y="GluePoint50Y"/>
-              </a:cxn>
-              <a:cxn ang="0">
-                <a:pos x="GluePoint51X" y="GluePoint51Y"/>
-              </a:cxn>
-              <a:cxn ang="0">
-                <a:pos x="GluePoint52X" y="GluePoint52Y"/>
-              </a:cxn>
-              <a:cxn ang="0">
-                <a:pos x="GluePoint53X" y="GluePoint53Y"/>
-              </a:cxn>
-              <a:cxn ang="0">
-                <a:pos x="GluePoint54X" y="GluePoint54Y"/>
-              </a:cxn>
-              <a:cxn ang="0">
-                <a:pos x="GluePoint55X" y="GluePoint55Y"/>
-              </a:cxn>
-              <a:cxn ang="0">
-                <a:pos x="GluePoint56X" y="GluePoint56Y"/>
-              </a:cxn>
-              <a:cxn ang="0">
-                <a:pos x="GluePoint57X" y="GluePoint57Y"/>
-              </a:cxn>
-              <a:cxn ang="0">
-                <a:pos x="GluePoint58X" y="GluePoint58Y"/>
-              </a:cxn>
-              <a:cxn ang="0">
-                <a:pos x="GluePoint59X" y="GluePoint59Y"/>
-              </a:cxn>
-              <a:cxn ang="0">
-                <a:pos x="GluePoint60X" y="GluePoint60Y"/>
-              </a:cxn>
-              <a:cxn ang="0">
-                <a:pos x="GluePoint61X" y="GluePoint61Y"/>
-              </a:cxn>
-              <a:cxn ang="0">
-                <a:pos x="GluePoint62X" y="GluePoint62Y"/>
-              </a:cxn>
-              <a:cxn ang="0">
-                <a:pos x="GluePoint63X" y="GluePoint63Y"/>
-              </a:cxn>
-              <a:cxn ang="0">
-                <a:pos x="GluePoint64X" y="GluePoint64Y"/>
-              </a:cxn>
-              <a:cxn ang="0">
-                <a:pos x="GluePoint65X" y="GluePoint65Y"/>
-              </a:cxn>
-              <a:cxn ang="0">
-                <a:pos x="GluePoint66X" y="GluePoint66Y"/>
-              </a:cxn>
-              <a:cxn ang="0">
-                <a:pos x="GluePoint67X" y="GluePoint67Y"/>
-              </a:cxn>
-              <a:cxn ang="0">
-                <a:pos x="GluePoint68X" y="GluePoint68Y"/>
-              </a:cxn>
-              <a:cxn ang="0">
-                <a:pos x="GluePoint69X" y="GluePoint69Y"/>
-              </a:cxn>
-              <a:cxn ang="0">
-                <a:pos x="GluePoint70X" y="GluePoint70Y"/>
-              </a:cxn>
-              <a:cxn ang="0">
-                <a:pos x="GluePoint71X" y="GluePoint71Y"/>
-              </a:cxn>
-              <a:cxn ang="0">
-                <a:pos x="GluePoint72X" y="GluePoint72Y"/>
-              </a:cxn>
-              <a:cxn ang="0">
-                <a:pos x="GluePoint73X" y="GluePoint73Y"/>
-              </a:cxn>
-              <a:cxn ang="0">
-                <a:pos x="GluePoint74X" y="GluePoint74Y"/>
-              </a:cxn>
-              <a:cxn ang="0">
-                <a:pos x="GluePoint75X" y="GluePoint75Y"/>
-              </a:cxn>
-              <a:cxn ang="0">
-                <a:pos x="GluePoint76X" y="GluePoint76Y"/>
-              </a:cxn>
-              <a:cxn ang="0">
-                <a:pos x="GluePoint77X" y="GluePoint77Y"/>
-              </a:cxn>
-              <a:cxn ang="0">
-                <a:pos x="GluePoint78X" y="GluePoint78Y"/>
-              </a:cxn>
-              <a:cxn ang="0">
-                <a:pos x="GluePoint79X" y="GluePoint79Y"/>
-              </a:cxn>
-              <a:cxn ang="0">
-                <a:pos x="GluePoint80X" y="GluePoint80Y"/>
-              </a:cxn>
-              <a:cxn ang="0">
-                <a:pos x="GluePoint81X" y="GluePoint81Y"/>
-              </a:cxn>
-              <a:cxn ang="0">
-                <a:pos x="GluePoint82X" y="GluePoint82Y"/>
-              </a:cxn>
-              <a:cxn ang="0">
-                <a:pos x="GluePoint83X" y="GluePoint83Y"/>
-              </a:cxn>
-              <a:cxn ang="0">
-                <a:pos x="GluePoint84X" y="GluePoint84Y"/>
-              </a:cxn>
-              <a:cxn ang="0">
-                <a:pos x="GluePoint85X" y="GluePoint85Y"/>
-              </a:cxn>
-              <a:cxn ang="0">
-                <a:pos x="GluePoint86X" y="GluePoint86Y"/>
-              </a:cxn>
-              <a:cxn ang="0">
-                <a:pos x="GluePoint87X" y="GluePoint87Y"/>
-              </a:cxn>
-              <a:cxn ang="0">
-                <a:pos x="GluePoint88X" y="GluePoint88Y"/>
-              </a:cxn>
-              <a:cxn ang="0">
-                <a:pos x="GluePoint89X" y="GluePoint89Y"/>
-              </a:cxn>
-              <a:cxn ang="0">
-                <a:pos x="GluePoint90X" y="GluePoint90Y"/>
-              </a:cxn>
-              <a:cxn ang="0">
-                <a:pos x="GluePoint91X" y="GluePoint91Y"/>
-              </a:cxn>
-              <a:cxn ang="0">
-                <a:pos x="GluePoint92X" y="GluePoint92Y"/>
-              </a:cxn>
-              <a:cxn ang="0">
-                <a:pos x="GluePoint93X" y="GluePoint93Y"/>
-              </a:cxn>
-              <a:cxn ang="0">
-                <a:pos x="GluePoint94X" y="GluePoint94Y"/>
-              </a:cxn>
-              <a:cxn ang="0">
-                <a:pos x="GluePoint95X" y="GluePoint95Y"/>
-              </a:cxn>
-            </a:cxnLst>
-            <a:rect l="textAreaLeft" t="textAreaTop" r="textAreaRight" b="textAreaBottom"/>
-            <a:pathLst>
-              <a:path w="457200" h="533978">
-                <a:moveTo>
-                  <a:pt x="447638" y="167819"/>
-                </a:moveTo>
-                <a:cubicBezTo>
-                  <a:pt x="441638" y="164368"/>
-                  <a:pt x="434513" y="164396"/>
-                  <a:pt x="428551" y="167884"/>
-                </a:cubicBezTo>
-                <a:lnTo>
-                  <a:pt x="338100" y="220663"/>
-                </a:lnTo>
-                <a:cubicBezTo>
-                  <a:pt x="335170" y="222370"/>
-                  <a:pt x="333375" y="225504"/>
-                  <a:pt x="333375" y="228889"/>
-                </a:cubicBezTo>
-                <a:lnTo>
-                  <a:pt x="333375" y="289677"/>
-                </a:lnTo>
-                <a:lnTo>
-                  <a:pt x="300539" y="306094"/>
-                </a:lnTo>
-                <a:cubicBezTo>
-                  <a:pt x="297312" y="307708"/>
-                  <a:pt x="295275" y="311005"/>
-                  <a:pt x="295275" y="314614"/>
-                </a:cubicBezTo>
-                <a:lnTo>
-                  <a:pt x="295275" y="347952"/>
-                </a:lnTo>
-                <a:lnTo>
-                  <a:pt x="266700" y="369383"/>
-                </a:lnTo>
-                <a:lnTo>
-                  <a:pt x="238125" y="347957"/>
-                </a:lnTo>
-                <a:lnTo>
-                  <a:pt x="238125" y="186023"/>
-                </a:lnTo>
-                <a:lnTo>
-                  <a:pt x="266700" y="164596"/>
-                </a:lnTo>
-                <a:lnTo>
-                  <a:pt x="295275" y="186027"/>
-                </a:lnTo>
-                <a:lnTo>
-                  <a:pt x="295275" y="223174"/>
-                </a:lnTo>
-                <a:lnTo>
-                  <a:pt x="314325" y="212221"/>
-                </a:lnTo>
-                <a:lnTo>
-                  <a:pt x="314325" y="181264"/>
-                </a:lnTo>
-                <a:cubicBezTo>
-                  <a:pt x="314325" y="178265"/>
-                  <a:pt x="312912" y="175442"/>
-                  <a:pt x="310511" y="173646"/>
-                </a:cubicBezTo>
-                <a:lnTo>
-                  <a:pt x="272411" y="145071"/>
-                </a:lnTo>
-                <a:cubicBezTo>
-                  <a:pt x="269025" y="142532"/>
-                  <a:pt x="264375" y="142532"/>
-                  <a:pt x="260989" y="145071"/>
-                </a:cubicBezTo>
-                <a:lnTo>
-                  <a:pt x="228600" y="169358"/>
-                </a:lnTo>
-                <a:lnTo>
-                  <a:pt x="196211" y="145071"/>
-                </a:lnTo>
-                <a:cubicBezTo>
-                  <a:pt x="193067" y="142700"/>
-                  <a:pt x="188798" y="142528"/>
-                  <a:pt x="185449" y="144611"/>
-                </a:cubicBezTo>
-                <a:lnTo>
-                  <a:pt x="147349" y="168424"/>
-                </a:lnTo>
-                <a:cubicBezTo>
-                  <a:pt x="144568" y="170168"/>
-                  <a:pt x="142875" y="173219"/>
-                  <a:pt x="142875" y="176502"/>
-                </a:cubicBezTo>
-                <a:lnTo>
-                  <a:pt x="142875" y="213477"/>
-                </a:lnTo>
-                <a:lnTo>
-                  <a:pt x="110039" y="229894"/>
-                </a:lnTo>
-                <a:cubicBezTo>
-                  <a:pt x="106812" y="231508"/>
-                  <a:pt x="104775" y="234805"/>
-                  <a:pt x="104775" y="238414"/>
-                </a:cubicBezTo>
-                <a:lnTo>
-                  <a:pt x="104775" y="299434"/>
-                </a:lnTo>
-                <a:lnTo>
-                  <a:pt x="19050" y="346195"/>
-                </a:lnTo>
-                <a:lnTo>
-                  <a:pt x="19050" y="160406"/>
-                </a:lnTo>
-                <a:cubicBezTo>
-                  <a:pt x="19050" y="147202"/>
-                  <a:pt x="26063" y="134728"/>
-                  <a:pt x="37337" y="127859"/>
-                </a:cubicBezTo>
-                <a:lnTo>
-                  <a:pt x="206964" y="24610"/>
-                </a:lnTo>
-                <a:cubicBezTo>
-                  <a:pt x="219893" y="16726"/>
-                  <a:pt x="236255" y="17271"/>
-                  <a:pt x="248636" y="25939"/>
-                </a:cubicBezTo>
-                <a:lnTo>
-                  <a:pt x="388884" y="124115"/>
-                </a:lnTo>
-                <a:lnTo>
-                  <a:pt x="342900" y="124115"/>
-                </a:lnTo>
-                <a:lnTo>
-                  <a:pt x="342900" y="143165"/>
-                </a:lnTo>
-                <a:lnTo>
-                  <a:pt x="419100" y="143165"/>
-                </a:lnTo>
-                <a:cubicBezTo>
-                  <a:pt x="424364" y="143165"/>
-                  <a:pt x="428625" y="138900"/>
-                  <a:pt x="428625" y="133640"/>
-                </a:cubicBezTo>
-                <a:lnTo>
-                  <a:pt x="428625" y="57440"/>
-                </a:lnTo>
-                <a:lnTo>
-                  <a:pt x="409575" y="57440"/>
-                </a:lnTo>
-                <a:lnTo>
-                  <a:pt x="409575" y="115347"/>
-                </a:lnTo>
-                <a:lnTo>
-                  <a:pt x="259556" y="10332"/>
-                </a:lnTo>
-                <a:cubicBezTo>
-                  <a:pt x="240971" y="-2681"/>
-                  <a:pt x="216442" y="-3463"/>
-                  <a:pt x="197067" y="8336"/>
-                </a:cubicBezTo>
-                <a:lnTo>
-                  <a:pt x="27440" y="111590"/>
-                </a:lnTo>
-                <a:cubicBezTo>
-                  <a:pt x="10511" y="121892"/>
-                  <a:pt x="0" y="140597"/>
-                  <a:pt x="0" y="160406"/>
-                </a:cubicBezTo>
-                <a:lnTo>
-                  <a:pt x="0" y="346195"/>
-                </a:lnTo>
-                <a:cubicBezTo>
-                  <a:pt x="0" y="352985"/>
-                  <a:pt x="3488" y="359110"/>
-                  <a:pt x="9320" y="362575"/>
-                </a:cubicBezTo>
-                <a:cubicBezTo>
-                  <a:pt x="12343" y="364370"/>
-                  <a:pt x="15692" y="365267"/>
-                  <a:pt x="19040" y="365267"/>
-                </a:cubicBezTo>
-                <a:cubicBezTo>
-                  <a:pt x="22166" y="365267"/>
-                  <a:pt x="25292" y="364486"/>
-                  <a:pt x="28165" y="362919"/>
-                </a:cubicBezTo>
-                <a:lnTo>
-                  <a:pt x="118858" y="313452"/>
-                </a:lnTo>
-                <a:cubicBezTo>
-                  <a:pt x="121918" y="311783"/>
-                  <a:pt x="123825" y="308574"/>
-                  <a:pt x="123825" y="305090"/>
-                </a:cubicBezTo>
-                <a:lnTo>
-                  <a:pt x="123825" y="244303"/>
-                </a:lnTo>
-                <a:lnTo>
-                  <a:pt x="156661" y="227885"/>
-                </a:lnTo>
-                <a:cubicBezTo>
-                  <a:pt x="159888" y="226272"/>
-                  <a:pt x="161925" y="222974"/>
-                  <a:pt x="161925" y="219365"/>
-                </a:cubicBezTo>
-                <a:lnTo>
-                  <a:pt x="161925" y="181782"/>
-                </a:lnTo>
-                <a:lnTo>
-                  <a:pt x="190007" y="164229"/>
-                </a:lnTo>
-                <a:lnTo>
-                  <a:pt x="219075" y="186023"/>
-                </a:lnTo>
-                <a:lnTo>
-                  <a:pt x="219075" y="347957"/>
-                </a:lnTo>
-                <a:lnTo>
-                  <a:pt x="190500" y="369384"/>
-                </a:lnTo>
-                <a:lnTo>
-                  <a:pt x="161925" y="347953"/>
-                </a:lnTo>
-                <a:lnTo>
-                  <a:pt x="161925" y="310805"/>
-                </a:lnTo>
-                <a:lnTo>
-                  <a:pt x="142875" y="321283"/>
-                </a:lnTo>
-                <a:lnTo>
-                  <a:pt x="142875" y="352715"/>
-                </a:lnTo>
-                <a:cubicBezTo>
-                  <a:pt x="142875" y="355715"/>
-                  <a:pt x="144289" y="358538"/>
-                  <a:pt x="146689" y="360333"/>
-                </a:cubicBezTo>
-                <a:lnTo>
-                  <a:pt x="184789" y="388908"/>
-                </a:lnTo>
-                <a:cubicBezTo>
-                  <a:pt x="188174" y="391448"/>
-                  <a:pt x="192825" y="391448"/>
-                  <a:pt x="196211" y="388908"/>
-                </a:cubicBezTo>
-                <a:lnTo>
-                  <a:pt x="228600" y="364622"/>
-                </a:lnTo>
-                <a:lnTo>
-                  <a:pt x="260989" y="388908"/>
-                </a:lnTo>
-                <a:cubicBezTo>
-                  <a:pt x="264374" y="391448"/>
-                  <a:pt x="269025" y="391448"/>
-                  <a:pt x="272411" y="388908"/>
-                </a:cubicBezTo>
-                <a:lnTo>
-                  <a:pt x="310511" y="360333"/>
-                </a:lnTo>
-                <a:cubicBezTo>
-                  <a:pt x="312911" y="358538"/>
-                  <a:pt x="314325" y="355715"/>
-                  <a:pt x="314325" y="352715"/>
-                </a:cubicBezTo>
-                <a:lnTo>
-                  <a:pt x="314325" y="320503"/>
-                </a:lnTo>
-                <a:lnTo>
-                  <a:pt x="347161" y="304085"/>
-                </a:lnTo>
-                <a:cubicBezTo>
-                  <a:pt x="350388" y="302472"/>
-                  <a:pt x="352425" y="299174"/>
-                  <a:pt x="352425" y="295565"/>
-                </a:cubicBezTo>
-                <a:lnTo>
-                  <a:pt x="352425" y="234360"/>
-                </a:lnTo>
-                <a:lnTo>
-                  <a:pt x="438150" y="184339"/>
-                </a:lnTo>
-                <a:lnTo>
-                  <a:pt x="438150" y="373574"/>
-                </a:lnTo>
-                <a:cubicBezTo>
-                  <a:pt x="438150" y="386778"/>
-                  <a:pt x="431137" y="399252"/>
-                  <a:pt x="419863" y="406121"/>
-                </a:cubicBezTo>
-                <a:lnTo>
-                  <a:pt x="250236" y="509370"/>
-                </a:lnTo>
-                <a:cubicBezTo>
-                  <a:pt x="237297" y="517235"/>
-                  <a:pt x="220945" y="516709"/>
-                  <a:pt x="208564" y="508041"/>
-                </a:cubicBezTo>
-                <a:lnTo>
-                  <a:pt x="68315" y="409865"/>
-                </a:lnTo>
-                <a:lnTo>
-                  <a:pt x="114300" y="409865"/>
-                </a:lnTo>
-                <a:lnTo>
-                  <a:pt x="114300" y="390815"/>
-                </a:lnTo>
-                <a:lnTo>
-                  <a:pt x="38100" y="390815"/>
-                </a:lnTo>
-                <a:cubicBezTo>
-                  <a:pt x="32836" y="390815"/>
-                  <a:pt x="28575" y="395080"/>
-                  <a:pt x="28575" y="400340"/>
-                </a:cubicBezTo>
-                <a:lnTo>
-                  <a:pt x="28575" y="476540"/>
-                </a:lnTo>
-                <a:lnTo>
-                  <a:pt x="47625" y="476540"/>
-                </a:lnTo>
-                <a:lnTo>
-                  <a:pt x="47625" y="418634"/>
-                </a:lnTo>
-                <a:lnTo>
-                  <a:pt x="197644" y="523649"/>
-                </a:lnTo>
-                <a:cubicBezTo>
-                  <a:pt x="207457" y="530518"/>
-                  <a:pt x="218926" y="533978"/>
-                  <a:pt x="230423" y="533978"/>
-                </a:cubicBezTo>
-                <a:cubicBezTo>
-                  <a:pt x="240692" y="533978"/>
-                  <a:pt x="250989" y="531211"/>
-                  <a:pt x="260133" y="525644"/>
-                </a:cubicBezTo>
-                <a:lnTo>
-                  <a:pt x="429759" y="422390"/>
-                </a:lnTo>
-                <a:cubicBezTo>
-                  <a:pt x="446689" y="412089"/>
-                  <a:pt x="457200" y="393382"/>
-                  <a:pt x="457200" y="373574"/>
-                </a:cubicBezTo>
-                <a:lnTo>
-                  <a:pt x="457200" y="184339"/>
-                </a:lnTo>
-                <a:cubicBezTo>
-                  <a:pt x="457200" y="177433"/>
-                  <a:pt x="453628" y="171256"/>
-                  <a:pt x="447638" y="167819"/>
-                </a:cubicBezTo>
-                <a:close/>
-              </a:path>
-            </a:pathLst>
-          </a:custGeom>
-          <a:gradFill rotWithShape="0">
-            <a:gsLst>
-              <a:gs pos="0">
-                <a:srgbClr val="41B3FF">
-                  <a:alpha val="84000"/>
-                </a:srgbClr>
-              </a:gs>
-              <a:gs pos="52000">
-                <a:srgbClr val="AD5CFF"/>
-              </a:gs>
-              <a:gs pos="100000">
-                <a:srgbClr val="FF5C85"/>
-              </a:gs>
-            </a:gsLst>
-            <a:lin ang="2700000"/>
-          </a:gradFill>
-          <a:ln w="9525">
-            <a:noFill/>
-          </a:ln>
-        </p:spPr>
-        <p:style>
-          <a:lnRef idx="0">
-            <a:scrgbClr r="0" g="0" b="0"/>
-          </a:lnRef>
-          <a:fillRef idx="0">
-            <a:scrgbClr r="0" g="0" b="0"/>
-          </a:fillRef>
-          <a:effectRef idx="0">
-            <a:scrgbClr r="0" g="0" b="0"/>
-          </a:effectRef>
-          <a:fontRef idx="minor"/>
-        </p:style>
-        <p:txBody>
-          <a:bodyPr lIns="90000" tIns="45000" rIns="90000" bIns="45000" anchor="ctr">
-            <a:noAutofit/>
-          </a:bodyPr>
-          <a:lstStyle/>
-          <a:p>
-            <a:pPr defTabSz="914400">
-              <a:lnSpc>
-                <a:spcPct val="100000"/>
-              </a:lnSpc>
-            </a:pPr>
-            <a:endParaRPr lang="en-US" sz="1800" b="0" u="none" strike="noStrike">
-              <a:solidFill>
-                <a:schemeClr val="lt1"/>
-              </a:solidFill>
-              <a:effectLst/>
-              <a:uFillTx/>
-              <a:latin typeface="Calibri"/>
             </a:endParaRPr>
           </a:p>
         </p:txBody>
@@ -4066,7 +3108,7 @@
 </file>
 
 <file path=ppt/theme/theme1.xml><?xml version="1.0" encoding="utf-8"?>
-<a:theme xmlns:a="http://schemas.openxmlformats.org/drawingml/2006/main" name="AWS Confidential Dark">
+<a:theme xmlns:a="http://schemas.openxmlformats.org/drawingml/2006/main" name="Database Modernizer Dark">
   <a:themeElements>
     <a:clrScheme name="AWS 2024">
       <a:dk1>

--- a/src/report/assets/template.pptx
+++ b/src/report/assets/template.pptx
@@ -1246,14 +1246,13 @@
           <p:nvPr/>
         </p:nvPicPr>
         <p:blipFill>
-          <a:blip r:embed="rId4"/>
-          <a:srcRect r="55119"/>
+          <a:blip r:embed="rId2"/>
           <a:stretch/>
         </p:blipFill>
         <p:spPr>
           <a:xfrm>
             <a:off x="612720" y="502920"/>
-            <a:ext cx="1164960" cy="739800"/>
+            <a:ext cx="1005840" cy="601535"/>
           </a:xfrm>
           <a:prstGeom prst="rect">
             <a:avLst/>

--- a/src/report/assets/template.pptx
+++ b/src/report/assets/template.pptx
@@ -731,94 +731,6 @@
           <a:chExt cx="0" cy="0"/>
         </a:xfrm>
       </p:grpSpPr>
-      <p:pic>
-        <p:nvPicPr>
-          <p:cNvPr id="491" name="Picture 14"/>
-          <p:cNvPicPr/>
-          <p:nvPr/>
-        </p:nvPicPr>
-        <p:blipFill>
-          <a:blip r:embed="rId2"/>
-          <a:stretch/>
-        </p:blipFill>
-        <p:spPr>
-          <a:xfrm>
-            <a:off x="595440" y="6338160"/>
-            <a:ext cx="365400" cy="218520"/>
-          </a:xfrm>
-          <a:prstGeom prst="rect">
-            <a:avLst/>
-          </a:prstGeom>
-          <a:noFill/>
-          <a:ln w="0">
-            <a:noFill/>
-          </a:ln>
-        </p:spPr>
-      </p:pic>
-      <p:sp>
-        <p:nvSpPr>
-          <p:cNvPr id="492" name="TextBox 10"/>
-          <p:cNvSpPr/>
-          <p:nvPr/>
-        </p:nvSpPr>
-        <p:spPr>
-          <a:xfrm>
-            <a:off x="1141200" y="6389640"/>
-            <a:ext cx="3936960" cy="184320"/>
-          </a:xfrm>
-          <a:prstGeom prst="rect">
-            <a:avLst/>
-          </a:prstGeom>
-          <a:noFill/>
-          <a:ln w="0">
-            <a:noFill/>
-          </a:ln>
-        </p:spPr>
-        <p:style>
-          <a:lnRef idx="0">
-            <a:scrgbClr r="0" g="0" b="0"/>
-          </a:lnRef>
-          <a:fillRef idx="0">
-            <a:scrgbClr r="0" g="0" b="0"/>
-          </a:fillRef>
-          <a:effectRef idx="0">
-            <a:scrgbClr r="0" g="0" b="0"/>
-          </a:effectRef>
-          <a:fontRef idx="minor"/>
-        </p:style>
-        <p:txBody>
-          <a:bodyPr wrap="none" lIns="90000" tIns="45000" rIns="90000" bIns="45000" anchor="t">
-            <a:spAutoFit/>
-          </a:bodyPr>
-          <a:lstStyle/>
-          <a:p>
-            <a:pPr defTabSz="914400">
-              <a:lnSpc>
-                <a:spcPct val="100000"/>
-              </a:lnSpc>
-            </a:pPr>
-            <a:r>
-              <a:rPr lang="en-US" sz="600" b="0" u="none" strike="noStrike">
-                <a:solidFill>
-                  <a:schemeClr val="lt2"/>
-                </a:solidFill>
-                <a:effectLst/>
-                <a:uFillTx/>
-                <a:latin typeface="Amazon Ember Display"/>
-              </a:rPr>
-              <a:t>© 2026 Amazon Web Services, Inc. or its affiliates. For informational purposes only.</a:t>
-            </a:r>
-            <a:endParaRPr lang="en-US" sz="600" b="0" u="none" strike="noStrike">
-              <a:solidFill>
-                <a:srgbClr val="FFFFFF"/>
-              </a:solidFill>
-              <a:effectLst/>
-              <a:uFillTx/>
-              <a:latin typeface="Arial"/>
-            </a:endParaRPr>
-          </a:p>
-        </p:txBody>
-      </p:sp>
       <p:sp>
         <p:nvSpPr>
           <p:cNvPr id="493" name="Slide Number Placeholder 5"/>
@@ -1299,94 +1211,6 @@
           <a:chExt cx="0" cy="0"/>
         </a:xfrm>
       </p:grpSpPr>
-      <p:pic>
-        <p:nvPicPr>
-          <p:cNvPr id="819" name="Picture 14"/>
-          <p:cNvPicPr/>
-          <p:nvPr/>
-        </p:nvPicPr>
-        <p:blipFill>
-          <a:blip r:embed="rId2"/>
-          <a:stretch/>
-        </p:blipFill>
-        <p:spPr>
-          <a:xfrm>
-            <a:off x="595440" y="6338160"/>
-            <a:ext cx="365400" cy="218520"/>
-          </a:xfrm>
-          <a:prstGeom prst="rect">
-            <a:avLst/>
-          </a:prstGeom>
-          <a:noFill/>
-          <a:ln w="0">
-            <a:noFill/>
-          </a:ln>
-        </p:spPr>
-      </p:pic>
-      <p:sp>
-        <p:nvSpPr>
-          <p:cNvPr id="820" name="TextBox 10"/>
-          <p:cNvSpPr/>
-          <p:nvPr/>
-        </p:nvSpPr>
-        <p:spPr>
-          <a:xfrm>
-            <a:off x="1141200" y="6389640"/>
-            <a:ext cx="3936960" cy="184320"/>
-          </a:xfrm>
-          <a:prstGeom prst="rect">
-            <a:avLst/>
-          </a:prstGeom>
-          <a:noFill/>
-          <a:ln w="0">
-            <a:noFill/>
-          </a:ln>
-        </p:spPr>
-        <p:style>
-          <a:lnRef idx="0">
-            <a:scrgbClr r="0" g="0" b="0"/>
-          </a:lnRef>
-          <a:fillRef idx="0">
-            <a:scrgbClr r="0" g="0" b="0"/>
-          </a:fillRef>
-          <a:effectRef idx="0">
-            <a:scrgbClr r="0" g="0" b="0"/>
-          </a:effectRef>
-          <a:fontRef idx="minor"/>
-        </p:style>
-        <p:txBody>
-          <a:bodyPr wrap="none" lIns="90000" tIns="45000" rIns="90000" bIns="45000" anchor="t">
-            <a:spAutoFit/>
-          </a:bodyPr>
-          <a:lstStyle/>
-          <a:p>
-            <a:pPr defTabSz="914400">
-              <a:lnSpc>
-                <a:spcPct val="100000"/>
-              </a:lnSpc>
-            </a:pPr>
-            <a:r>
-              <a:rPr lang="en-US" sz="600" b="0" u="none" strike="noStrike">
-                <a:solidFill>
-                  <a:schemeClr val="lt2"/>
-                </a:solidFill>
-                <a:effectLst/>
-                <a:uFillTx/>
-                <a:latin typeface="Amazon Ember Display"/>
-              </a:rPr>
-              <a:t>© 2026 Amazon Web Services, Inc. or its affiliates. For informational purposes only.</a:t>
-            </a:r>
-            <a:endParaRPr lang="en-US" sz="600" b="0" u="none" strike="noStrike">
-              <a:solidFill>
-                <a:srgbClr val="FFFFFF"/>
-              </a:solidFill>
-              <a:effectLst/>
-              <a:uFillTx/>
-              <a:latin typeface="Arial"/>
-            </a:endParaRPr>
-          </a:p>
-        </p:txBody>
-      </p:sp>
       <p:sp>
         <p:nvSpPr>
           <p:cNvPr id="821" name="Slide Number Placeholder 5"/>
